--- a/week-03/presentations/ppts/day-03-non-functional-requirements.pptx
+++ b/week-03/presentations/ppts/day-03-non-functional-requirements.pptx
@@ -1449,7 +1449,7 @@
             </a:pPr>
             <a:r>
               <a:rPr/>
-              <a:t>By 16:00, every triad has §7 complete. PRD is one day from full assembly.</a:t>
+              <a:t>By 16:00, every triad has Section 7 complete. PRD is one day from full assembly.</a:t>
             </a:r>
           </a:p>
         </p:txBody>
@@ -1777,7 +1777,7 @@
             </a:pPr>
             <a:r>
               <a:rPr/>
-              <a:t>The push-back test sharpens self-assessment. Tomorrow assembles §§8–11 and integrates the full PRD for Friday review.</a:t>
+              <a:t>The push-back test sharpens self-assessment. Tomorrow assembles Sections 8–11 and integrates the full PRD for Friday review.</a:t>
             </a:r>
           </a:p>
         </p:txBody>
@@ -6753,7 +6753,7 @@
             </a:pPr>
             <a:r>
               <a:rPr/>
-              <a:t>Add §8 Metrics, §9 Risks, §10 Deps, §11 Out-of-scope</a:t>
+              <a:t>Add Section 8 Metrics, Section 9 Risks, Section 10 Deps, Section 11 Out-of-scope</a:t>
             </a:r>
           </a:p>
           <a:p>
@@ -6780,7 +6780,7 @@
             </a:pPr>
             <a:r>
               <a:rPr/>
-              <a:t>Bring to Day 4: §§1–7 complete. Tomorrow you ship.</a:t>
+              <a:t>Bring to Day 4: Sections 1–7 complete. Tomorrow you ship.</a:t>
             </a:r>
           </a:p>
         </p:txBody>
@@ -6963,7 +6963,7 @@
             </a:pPr>
             <a:r>
               <a:rPr/>
-              <a:t>Deliver §7 with 6–10 NFRs + a Known Trade-offs subsection</a:t>
+              <a:t>Deliver Section 7 with 6–10 NFRs + a Known Trade-offs subsection</a:t>
             </a:r>
           </a:p>
         </p:txBody>
@@ -7080,7 +7080,7 @@
             </a:pPr>
             <a:r>
               <a:rPr/>
-              <a:t>Recap §6; restate non-AI; print NFR template</a:t>
+              <a:t>Recap Section 6; restate non-AI; print NFR template</a:t>
             </a:r>
           </a:p>
           <a:p>

--- a/week-03/presentations/ppts/day-03-non-functional-requirements.pptx
+++ b/week-03/presentations/ppts/day-03-non-functional-requirements.pptx
@@ -5855,16 +5855,16 @@
             </a:pPr>
             <a:r>
               <a:rPr/>
-              <a:t>Data classification: PII / PCI / internal / public — what touches what?</a:t>
-            </a:r>
-          </a:p>
-          <a:p>
-            <a:pPr lvl="0" indent="0" marL="0">
-              <a:buNone/>
-            </a:pPr>
-            <a:r>
-              <a:rPr/>
-              <a:t>Encryption: In transit (TLS 1.2+); at rest (managed keys?)</a:t>
+              <a:t>Data classification: personally identifiable information (PII) / Payment Card Industry (PCI) / internal / public — what touches what?</a:t>
+            </a:r>
+          </a:p>
+          <a:p>
+            <a:pPr lvl="0" indent="0" marL="0">
+              <a:buNone/>
+            </a:pPr>
+            <a:r>
+              <a:rPr/>
+              <a:t>Encryption: In transit via Transport Layer Security (TLS 1.2+); at rest (managed keys?)</a:t>
             </a:r>
           </a:p>
           <a:p>
@@ -6744,7 +6744,7 @@
             </a:pPr>
             <a:r>
               <a:rPr/>
-              <a:t>Mini-capstone PRD assembly</a:t>
+              <a:t>Mini-capstone Product Requirements Document (PRD) assembly</a:t>
             </a:r>
           </a:p>
           <a:p>
@@ -6954,7 +6954,7 @@
             </a:pPr>
             <a:r>
               <a:rPr/>
-              <a:t>Surface NFR trade-offs explicitly — mature PRDs name the tensions</a:t>
+              <a:t>Surface NFR trade-offs explicitly — mature Product Requirements Documents (PRDs) name the tensions</a:t>
             </a:r>
           </a:p>
           <a:p>
@@ -7581,6 +7581,15 @@
         <p:txBody>
           <a:bodyPr/>
           <a:lstStyle/>
+          <a:p>
+            <a:pPr lvl="0" indent="0" marL="0">
+              <a:buNone/>
+            </a:pPr>
+            <a:r>
+              <a:rPr/>
+              <a:t>Accessibility follows the Web Content Accessibility Guidelines (WCAG) 2.1 AA standard.</a:t>
+            </a:r>
+          </a:p>
           <a:p>
             <a:pPr lvl="0" indent="0" marL="0">
               <a:buNone/>

--- a/week-03/presentations/ppts/day-03-non-functional-requirements.pptx
+++ b/week-03/presentations/ppts/day-03-non-functional-requirements.pptx
@@ -5934,6 +5934,31 @@
           </a:p>
         </p:txBody>
       </p:sp>
+      <p:sp>
+        <p:nvSpPr>
+          <p:cNvPr id="3" name="Content Placeholder 2"/>
+          <p:cNvSpPr>
+            <a:spLocks noGrp="1"/>
+          </p:cNvSpPr>
+          <p:nvPr>
+            <p:ph idx="1"/>
+          </p:nvPr>
+        </p:nvSpPr>
+        <p:spPr/>
+        <p:txBody>
+          <a:bodyPr/>
+          <a:lstStyle/>
+          <a:p>
+            <a:pPr lvl="0" indent="0" marL="0">
+              <a:buNone/>
+            </a:pPr>
+            <a:r>
+              <a:rPr/>
+              <a:t>The floor is the Web Content Accessibility Guidelines (WCAG) 2.1 AA standard.</a:t>
+            </a:r>
+          </a:p>
+        </p:txBody>
+      </p:sp>
     </p:spTree>
   </p:cSld>
 </p:sld>
@@ -7581,15 +7606,6 @@
         <p:txBody>
           <a:bodyPr/>
           <a:lstStyle/>
-          <a:p>
-            <a:pPr lvl="0" indent="0" marL="0">
-              <a:buNone/>
-            </a:pPr>
-            <a:r>
-              <a:rPr/>
-              <a:t>Accessibility follows the Web Content Accessibility Guidelines (WCAG) 2.1 AA standard.</a:t>
-            </a:r>
-          </a:p>
           <a:p>
             <a:pPr lvl="0" indent="0" marL="0">
               <a:buNone/>

--- a/week-03/presentations/ppts/day-03-non-functional-requirements.pptx
+++ b/week-03/presentations/ppts/day-03-non-functional-requirements.pptx
@@ -5503,6 +5503,44 @@
           </a:p>
         </p:txBody>
       </p:sp>
+      <p:sp>
+        <p:nvSpPr>
+          <p:cNvPr id="3" name="Content Placeholder 2"/>
+          <p:cNvSpPr>
+            <a:spLocks noGrp="1"/>
+          </p:cNvSpPr>
+          <p:nvPr>
+            <p:ph idx="1"/>
+          </p:nvPr>
+        </p:nvSpPr>
+        <p:spPr/>
+        <p:txBody>
+          <a:bodyPr/>
+          <a:lstStyle/>
+          <a:p>
+            <a:pPr lvl="0" indent="0">
+              <a:buNone/>
+            </a:pPr>
+            <a:r>
+              <a:rPr>
+                <a:latin typeface="Courier"/>
+              </a:rPr>
+              <a:t>### NFR — Reconcile flow latency
+**Category:** Performance
+**Requirement:** Modal opens within 1 second (p95) on the median
+dispatcher device (mid-tier Android, 2-yr-old hardware)
+on a 4G LTE connection.
+**Defense:** Dispatchers tap "Reconcile all" 30+ times per shift.
+At p95 = 1s, cumulative wait ≤ 30s/shift. At p95 = 3s,
+wait = 90s/shift, crossing the threshold dispatchers
+reported as "I'd rather use paper."
+**Verification:** Synthetic transaction in Datadog from a fleet of
+mid-tier devices. p95 reported daily; alert if 7-day
+trailing p95 &gt; 1.2s.</a:t>
+            </a:r>
+          </a:p>
+        </p:txBody>
+      </p:sp>
     </p:spTree>
   </p:cSld>
 </p:sld>
@@ -5565,6 +5603,28 @@
           <a:bodyPr/>
           <a:lstStyle/>
           <a:p>
+            <a:pPr lvl="0" indent="0">
+              <a:buNone/>
+            </a:pPr>
+            <a:r>
+              <a:rPr>
+                <a:latin typeface="Courier"/>
+              </a:rPr>
+              <a:t>### NFR — Reconcile flow event coverage
+**Category:** Observability
+**Requirement:** The reconcile flow emits structured events for:
+open_modal, ticket_select, ticket_deselect,
+submit_attempt, submit_success, submit_failure (with
+reason), abandon (modal closed without submit).
+**Defense:** Three Tier-Sheet operational signals (abandonment rate,
+submit-failure reasons, time-to-submit) require these
+events. Without them, we cannot measure success.
+**Verification:** Smoke test in staging asserts each event fires;
+production dashboard tracks event counts per dispatcher
+per shift.</a:t>
+            </a:r>
+          </a:p>
+          <a:p>
             <a:pPr lvl="0" indent="0" marL="0">
               <a:buNone/>
             </a:pPr>
@@ -5957,6 +6017,27 @@
               <a:t>The floor is the Web Content Accessibility Guidelines (WCAG) 2.1 AA standard.</a:t>
             </a:r>
           </a:p>
+          <a:p>
+            <a:pPr lvl="0" indent="0">
+              <a:buNone/>
+            </a:pPr>
+            <a:r>
+              <a:rPr>
+                <a:latin typeface="Courier"/>
+              </a:rPr>
+              <a:t>### NFR — Accessibility floor
+**Category:** Accessibility
+**Requirement:** The reconcile flow conforms to WCAG 2.1 AA. All
+interactive elements keyboard-focusable; visible focus
+indicators; 4.5:1 text contrast minimum; form fields
+labeled; error messages identify the field.
+**Defense:** Customer base includes dispatchers using assistive
+technology (Interview 3: screen-reader user). ADA
+exposure is non-trivial in our segment.
+**Verification:** axe-core scan on every PR; manual screen-reader
+pass before launch.</a:t>
+            </a:r>
+          </a:p>
         </p:txBody>
       </p:sp>
     </p:spTree>
@@ -6021,6 +6102,26 @@
           <a:bodyPr/>
           <a:lstStyle/>
           <a:p>
+            <a:pPr lvl="0" indent="0">
+              <a:buNone/>
+            </a:pPr>
+            <a:r>
+              <a:rPr>
+                <a:latin typeface="Courier"/>
+              </a:rPr>
+              <a:t>### NFR — Audit trail retention
+**Category:** Compliance
+**Requirement:** Reconcile-flow events are retained for 24 months
+in the audit event store, queryable by dispatcher_id
+and date range.
+**Defense:** SOC 2 Type II requires user-action audit trail;
+dispatch decisions are subject to wage-and-hour audit
+by some state authorities.
+**Verification:** Quarterly audit-trail test: random user-event
+from 18 months ago must be retrievable in &lt;10 minutes.</a:t>
+            </a:r>
+          </a:p>
+          <a:p>
             <a:pPr lvl="0" indent="0" marL="0">
               <a:buNone/>
             </a:pPr>
@@ -6519,6 +6620,41 @@
           </a:p>
         </p:txBody>
       </p:sp>
+      <p:sp>
+        <p:nvSpPr>
+          <p:cNvPr id="3" name="Content Placeholder 2"/>
+          <p:cNvSpPr>
+            <a:spLocks noGrp="1"/>
+          </p:cNvSpPr>
+          <p:nvPr>
+            <p:ph idx="1"/>
+          </p:nvPr>
+        </p:nvSpPr>
+        <p:spPr/>
+        <p:txBody>
+          <a:bodyPr/>
+          <a:lstStyle/>
+          <a:p>
+            <a:pPr lvl="0" indent="0">
+              <a:buNone/>
+            </a:pPr>
+            <a:r>
+              <a:rPr>
+                <a:latin typeface="Courier"/>
+              </a:rPr>
+              <a:t>### Known trade-offs (in this section)
+- **Audit logging vs latency:** NFR-7 (full event logging) adds
+~30ms to the hot path tested in NFR-1. We accept this; if
+hot-path latency becomes the bottleneck, we will move logging
+to async dispatch.
+- **Strict RBAC vs onboarding:** NFR-10 (managers cannot view
+dispatcher reconciles in their first week) blocks an onboarding
+scenario. Resolved: managers see read-only view in week 1; full
+view in week 2.</a:t>
+            </a:r>
+          </a:p>
+        </p:txBody>
+      </p:sp>
     </p:spTree>
   </p:cSld>
 </p:sld>
@@ -7361,6 +7497,21 @@
             <a:r>
               <a:rPr/>
               <a:t>An NFR is a constraint the system must hold under specified conditions, with a measurable target, a defended rationale, and a verification method.</a:t>
+            </a:r>
+          </a:p>
+          <a:p>
+            <a:pPr lvl="0" indent="0">
+              <a:buNone/>
+            </a:pPr>
+            <a:r>
+              <a:rPr>
+                <a:latin typeface="Courier"/>
+              </a:rPr>
+              <a:t>### NFR — &lt;short name&gt;
+**Category:** Performance / Security / Accessibility / Observability / Compliance
+**Requirement:** &lt;specific, measurable target&gt;
+**Defense:** &lt;why this number; what scenario justifies it&gt;
+**Verification:** &lt;how we test/observe in production&gt;</a:t>
             </a:r>
           </a:p>
           <a:p>

--- a/week-03/presentations/ppts/day-03-non-functional-requirements.pptx
+++ b/week-03/presentations/ppts/day-03-non-functional-requirements.pptx
@@ -711,7 +711,7 @@
             </a:pPr>
             <a:r>
               <a:rPr/>
-              <a:t>This is where Week-2’s Tier Sheet pays off. Triads who skipped that work struggle here.</a:t>
+              <a:t>This is where Week-2’s Tier Sheet pays off. Quads who skipped that work struggle here.</a:t>
             </a:r>
           </a:p>
         </p:txBody>
@@ -793,7 +793,7 @@
             </a:pPr>
             <a:r>
               <a:rPr/>
-              <a:t>If a triad’s perf target is “average,” push to p95. Average is the most common rookie failure.</a:t>
+              <a:t>If a quad’s perf target is “average,” push to p95. Average is the most common rookie failure.</a:t>
             </a:r>
           </a:p>
         </p:txBody>
@@ -875,7 +875,7 @@
             </a:pPr>
             <a:r>
               <a:rPr/>
-              <a:t>These categories often get skipped or hand-waved. Today triads draft first versions — specific enough that security, a11y, and compliance reviewers can react.</a:t>
+              <a:t>These categories often get skipped or hand-waved. Today quads draft first versions — specific enough that security, a11y, and compliance reviewers can react.</a:t>
             </a:r>
           </a:p>
         </p:txBody>
@@ -1039,7 +1039,7 @@
             </a:pPr>
             <a:r>
               <a:rPr/>
-              <a:t>If a triad omits A11y, redirect to Week 2 Day 3’s A11y Floor work. The 8 checks become the requirement.</a:t>
+              <a:t>If a quad omits A11y, redirect to Week 2 Day 3’s A11y Floor work. The 8 checks become the requirement.</a:t>
             </a:r>
           </a:p>
         </p:txBody>
@@ -1367,7 +1367,7 @@
             </a:pPr>
             <a:r>
               <a:rPr/>
-              <a:t>The “Known Trade-offs” subsection is the senior-author signal. Triads who include it score higher Friday.</a:t>
+              <a:t>The “Known Trade-offs” subsection is the senior-author signal. Quads who include it score higher Friday.</a:t>
             </a:r>
           </a:p>
         </p:txBody>
@@ -1449,7 +1449,7 @@
             </a:pPr>
             <a:r>
               <a:rPr/>
-              <a:t>By 16:00, every triad has Section 7 complete. PRD is one day from full assembly.</a:t>
+              <a:t>By 16:00, every quad has Section 7 complete. PRD is one day from full assembly.</a:t>
             </a:r>
           </a:p>
         </p:txBody>
@@ -1613,7 +1613,7 @@
             </a:pPr>
             <a:r>
               <a:rPr/>
-              <a:t>Wrap share: each triad reads aloud one explicit trade-off they made.</a:t>
+              <a:t>Wrap share: each quad reads aloud one explicit trade-off they made.</a:t>
             </a:r>
           </a:p>
         </p:txBody>
@@ -1941,7 +1941,7 @@
             </a:pPr>
             <a:r>
               <a:rPr/>
-              <a:t>Most NFR sections fail by being either generic (“the system shall be performant”) or untestable. Block 1 calibrates the shape before triads write anything.</a:t>
+              <a:t>Most NFR sections fail by being either generic (“the system shall be performant”) or untestable. Block 1 calibrates the shape before quads write anything.</a:t>
             </a:r>
           </a:p>
         </p:txBody>
@@ -2269,7 +2269,7 @@
             </a:pPr>
             <a:r>
               <a:rPr/>
-              <a:t>Triads will under-detect “no defense” — it sounds clean if the number is specific. Surface this with your own example.</a:t>
+              <a:t>Quads will under-detect “no defense” — it sounds clean if the number is specific. Surface this with your own example.</a:t>
             </a:r>
           </a:p>
         </p:txBody>
@@ -2351,7 +2351,7 @@
             </a:pPr>
             <a:r>
               <a:rPr/>
-              <a:t>Performance and observability are paired because one is meaningless without the other. Push triads toward p95 targets and named events, not averages and vague “monitoring.”</a:t>
+              <a:t>Performance and observability are paired because one is meaningless without the other. Push quads toward p95 targets and named events, not averages and vague “monitoring.”</a:t>
             </a:r>
           </a:p>
         </p:txBody>
@@ -5705,16 +5705,16 @@
             </a:pPr>
             <a:r>
               <a:rPr b="1"/>
-              <a:t>Triads • 40 minutes</a:t>
-            </a:r>
-          </a:p>
-          <a:p>
-            <a:pPr lvl="0" indent="0" marL="0">
-              <a:buNone/>
-            </a:pPr>
-            <a:r>
-              <a:rPr/>
-              <a:t>Each member proposes 1 Performance NFR; triad picks 2–3. Same drill for Observability.</a:t>
+              <a:t>Quads • 40 minutes</a:t>
+            </a:r>
+          </a:p>
+          <a:p>
+            <a:pPr lvl="0" indent="0" marL="0">
+              <a:buNone/>
+            </a:pPr>
+            <a:r>
+              <a:rPr/>
+              <a:t>Each member proposes 1 Performance NFR; quad picks 2–3. Same drill for Observability.</a:t>
             </a:r>
           </a:p>
           <a:p>
@@ -6202,7 +6202,7 @@
             </a:pPr>
             <a:r>
               <a:rPr b="1"/>
-              <a:t>Triads • 40 minutes</a:t>
+              <a:t>Quads • 40 minutes</a:t>
             </a:r>
           </a:p>
           <a:p>
@@ -6725,7 +6725,7 @@
             </a:pPr>
             <a:r>
               <a:rPr b="1"/>
-              <a:t>Triad pairs • 45 minutes • Wrap</a:t>
+              <a:t>Quad pairs • 45 minutes • Wrap</a:t>
             </a:r>
           </a:p>
           <a:p>
@@ -6761,7 +6761,7 @@
             </a:pPr>
             <a:r>
               <a:rPr/>
-              <a:t>10 min: author triad responds</a:t>
+              <a:t>10 min: author quad responds</a:t>
             </a:r>
           </a:p>
           <a:p>
@@ -8090,7 +8090,7 @@
             </a:pPr>
             <a:r>
               <a:rPr b="1"/>
-              <a:t>Triads • 35 minutes</a:t>
+              <a:t>Quads • 35 minutes</a:t>
             </a:r>
           </a:p>
           <a:p>

--- a/week-03/presentations/ppts/day-03-non-functional-requirements.pptx
+++ b/week-03/presentations/ppts/day-03-non-functional-requirements.pptx
@@ -5705,7 +5705,7 @@
             </a:pPr>
             <a:r>
               <a:rPr b="1"/>
-              <a:t>Quads • 40 minutes</a:t>
+              <a:t>Quads • 50 minutes</a:t>
             </a:r>
           </a:p>
           <a:p>
@@ -6202,7 +6202,7 @@
             </a:pPr>
             <a:r>
               <a:rPr b="1"/>
-              <a:t>Quads • 40 minutes</a:t>
+              <a:t>Quads • 50 minutes</a:t>
             </a:r>
           </a:p>
           <a:p>
@@ -6725,7 +6725,7 @@
             </a:pPr>
             <a:r>
               <a:rPr b="1"/>
-              <a:t>Quad pairs • 45 minutes • Wrap</a:t>
+              <a:t>Quad pairs • 55 minutes • Wrap</a:t>
             </a:r>
           </a:p>
           <a:p>
@@ -8090,7 +8090,7 @@
             </a:pPr>
             <a:r>
               <a:rPr b="1"/>
-              <a:t>Quads • 35 minutes</a:t>
+              <a:t>Quads • 45 minutes</a:t>
             </a:r>
           </a:p>
           <a:p>

--- a/week-03/presentations/ppts/day-03-non-functional-requirements.pptx
+++ b/week-03/presentations/ppts/day-03-non-functional-requirements.pptx
@@ -5723,7 +5723,7 @@
             </a:pPr>
             <a:r>
               <a:rPr/>
-              <a:t>15 min: 2–3 Performance NFRs with defenses</a:t>
+              <a:t>25 min: 2–3 Performance NFRs with defenses</a:t>
             </a:r>
           </a:p>
           <a:p>
@@ -5750,7 +5750,7 @@
             </a:pPr>
             <a:r>
               <a:rPr/>
-              <a:t>⏱ 15 + 15 + 10</a:t>
+              <a:t>⏱ 25 + 15 + 10</a:t>
             </a:r>
           </a:p>
         </p:txBody>
@@ -6220,7 +6220,7 @@
             </a:pPr>
             <a:r>
               <a:rPr/>
-              <a:t>15 min: Security (3–5 NFRs)</a:t>
+              <a:t>25 min: Security (3–5 NFRs)</a:t>
             </a:r>
           </a:p>
           <a:p>
@@ -6256,7 +6256,7 @@
             </a:pPr>
             <a:r>
               <a:rPr/>
-              <a:t>⏱ 15 + 10 + 10 + 5</a:t>
+              <a:t>⏱ 25 + 10 + 10 + 5</a:t>
             </a:r>
           </a:p>
         </p:txBody>
@@ -6770,16 +6770,16 @@
             </a:pPr>
             <a:r>
               <a:rPr/>
-              <a:t>15 min: revise + add Known Trade-offs subsection</a:t>
-            </a:r>
-          </a:p>
-          <a:p>
-            <a:pPr lvl="0" indent="0" marL="0">
-              <a:buNone/>
-            </a:pPr>
-            <a:r>
-              <a:rPr/>
-              <a:t>⏱ 10 + 10 + 10 + 15 · 15-min wrap-share</a:t>
+              <a:t>25 min: revise + add Known Trade-offs subsection</a:t>
+            </a:r>
+          </a:p>
+          <a:p>
+            <a:pPr lvl="0" indent="0" marL="0">
+              <a:buNone/>
+            </a:pPr>
+            <a:r>
+              <a:rPr/>
+              <a:t>⏱ 10 + 10 + 10 + 25 · 15-min wrap-share</a:t>
             </a:r>
           </a:p>
         </p:txBody>
@@ -8108,7 +8108,7 @@
             </a:pPr>
             <a:r>
               <a:rPr/>
-              <a:t>15 min: triage all 10</a:t>
+              <a:t>25 min: triage all 10</a:t>
             </a:r>
           </a:p>
           <a:p>
